--- a/docs/prerequisites/cen429-on-gereksinimler-sunum.tr.pptx
+++ b/docs/prerequisites/cen429-on-gereksinimler-sunum.tr.pptx
@@ -7356,7 +7356,7 @@
                   <a:srgbClr val="1F2D3A"/>
                 </a:solidFill>
               </a:rPr>
-              <a:t>Proje şablonunu kendi hesabınıza çatallayıp (fork) derleyin ve testlerini çalıştırın:</a:t>
+              <a:t>Proje şablonundan kendi özel deponuzu oluşturun ("Use this template → Private", fork değil), derleyin ve testlerini çalıştırın:</a:t>
             </a:r>
           </a:p>
         </p:txBody>
@@ -7986,7 +7986,7 @@
         </p:nvGraphicFramePr>
         <p:xfrm>
           <a:off x="640080" y="1325880"/>
-          <a:ext cx="10911534" cy="2459735"/>
+          <a:ext cx="10911534" cy="2697479"/>
         </p:xfrm>
         <a:graphic>
           <a:graphicData uri="http://schemas.openxmlformats.org/drawingml/2006/table">
@@ -7995,10 +7995,10 @@
                 <a:tableStyleId>{5C22544A-7EE6-4342-B048-85BDC9FD1C3A}</a:tableStyleId>
               </a:tblPr>
               <a:tblGrid>
-                <a:gridCol w="2664444"/>
-                <a:gridCol w="8247090"/>
+                <a:gridCol w="3239361"/>
+                <a:gridCol w="7672173"/>
               </a:tblGrid>
-              <a:tr h="409955">
+              <a:tr h="449579">
                 <a:tc>
                   <a:txBody>
                     <a:bodyPr wrap="square"/>
@@ -8042,7 +8042,7 @@
                   </a:tcPr>
                 </a:tc>
               </a:tr>
-              <a:tr h="409955">
+              <a:tr h="449579">
                 <a:tc>
                   <a:txBody>
                     <a:bodyPr wrap="square"/>
@@ -8086,7 +8086,7 @@
                   </a:tcPr>
                 </a:tc>
               </a:tr>
-              <a:tr h="409955">
+              <a:tr h="449579">
                 <a:tc>
                   <a:txBody>
                     <a:bodyPr wrap="square"/>
@@ -8130,7 +8130,7 @@
                   </a:tcPr>
                 </a:tc>
               </a:tr>
-              <a:tr h="409955">
+              <a:tr h="449579">
                 <a:tc>
                   <a:txBody>
                     <a:bodyPr wrap="square"/>
@@ -8174,7 +8174,7 @@
                   </a:tcPr>
                 </a:tc>
               </a:tr>
-              <a:tr h="409955">
+              <a:tr h="449579">
                 <a:tc>
                   <a:txBody>
                     <a:bodyPr wrap="square"/>
@@ -8186,7 +8186,7 @@
                             <a:srgbClr val="1F2D3A"/>
                           </a:solidFill>
                         </a:rPr>
-                        <a:t>Fork (çatallamak)</a:t>
+                        <a:t>Use this template (şablondan depo)</a:t>
                       </a:r>
                     </a:p>
                   </a:txBody>
@@ -8207,7 +8207,7 @@
                             <a:srgbClr val="1F2D3A"/>
                           </a:solidFill>
                         </a:rPr>
-                        <a:t>Bir deponun kendi hesabınıza kopyasını almak</a:t>
+                        <a:t>Şablonun dosyalarıyla, geçmişi olmayan yeni bir depo açmak; özel (private) yapılabilir</a:t>
                       </a:r>
                     </a:p>
                   </a:txBody>
@@ -8218,7 +8218,7 @@
                   </a:tcPr>
                 </a:tc>
               </a:tr>
-              <a:tr h="409960">
+              <a:tr h="449584">
                 <a:tc>
                   <a:txBody>
                     <a:bodyPr wrap="square"/>
@@ -10809,7 +10809,7 @@
                   <a:srgbClr val="1F2D3A"/>
                 </a:solidFill>
               </a:rPr>
-              <a:t>Şablonu çatallamak (fork)</a:t>
+              <a:t>Şablondan özel depo oluşturmak ("Use this template", fork değil)</a:t>
             </a:r>
           </a:p>
           <a:p>
